--- a/MAGYARORSZÁG LAKOSSÁGA 2025 ÉV.pptx
+++ b/MAGYARORSZÁG LAKOSSÁGA 2025 ÉV.pptx
@@ -8,6 +8,8 @@
     <p:sldId id="256" r:id="rId2"/>
     <p:sldId id="257" r:id="rId3"/>
     <p:sldId id="258" r:id="rId4"/>
+    <p:sldId id="259" r:id="rId5"/>
+    <p:sldId id="260" r:id="rId6"/>
   </p:sldIdLst>
   <p:sldSz cx="12192000" cy="6858000"/>
   <p:notesSz cx="6858000" cy="9144000"/>
@@ -106,6 +108,11 @@
       </a:defRPr>
     </a:lvl9pPr>
   </p:defaultTextStyle>
+  <p:extLst>
+    <p:ext uri="{EFAFB233-063F-42B5-8137-9DF3F51BA10A}">
+      <p15:sldGuideLst xmlns:p15="http://schemas.microsoft.com/office/powerpoint/2012/main"/>
+    </p:ext>
+  </p:extLst>
 </p:presentation>
 </file>
 
@@ -383,7 +390,7 @@
           <a:p>
             <a:fld id="{78ABE3C1-DBE1-495D-B57B-2849774B866A}" type="datetimeFigureOut">
               <a:rPr lang="en-US" dirty="0"/>
-              <a:t>9/15/2026</a:t>
+              <a:t>9/18/2026</a:t>
             </a:fld>
             <a:endParaRPr lang="en-US" dirty="0"/>
           </a:p>
@@ -792,7 +799,7 @@
           <a:p>
             <a:fld id="{446C117F-5CCF-4837-BE5F-2B92066CAFAF}" type="datetimeFigureOut">
               <a:rPr lang="en-US" dirty="0"/>
-              <a:t>9/15/2026</a:t>
+              <a:t>9/18/2026</a:t>
             </a:fld>
             <a:endParaRPr lang="en-US" dirty="0"/>
           </a:p>
@@ -1123,7 +1130,7 @@
           <a:p>
             <a:fld id="{84EB90BD-B6CE-46B7-997F-7313B992CCDC}" type="datetimeFigureOut">
               <a:rPr lang="en-US" dirty="0"/>
-              <a:t>9/15/2026</a:t>
+              <a:t>9/18/2026</a:t>
             </a:fld>
             <a:endParaRPr lang="en-US" dirty="0"/>
           </a:p>
@@ -1523,7 +1530,7 @@
           <a:p>
             <a:fld id="{CDB9D11F-B188-461D-B23F-39381795C052}" type="datetimeFigureOut">
               <a:rPr lang="en-US" dirty="0"/>
-              <a:t>9/15/2026</a:t>
+              <a:t>9/18/2026</a:t>
             </a:fld>
             <a:endParaRPr lang="en-US" dirty="0"/>
           </a:p>
@@ -2086,7 +2093,7 @@
           <a:p>
             <a:fld id="{52E6D8D9-55A2-4063-B0F3-121F44549695}" type="datetimeFigureOut">
               <a:rPr lang="en-US" dirty="0"/>
-              <a:t>9/15/2026</a:t>
+              <a:t>9/18/2026</a:t>
             </a:fld>
             <a:endParaRPr lang="en-US" dirty="0"/>
           </a:p>
@@ -2762,7 +2769,7 @@
           <a:p>
             <a:fld id="{D4B24536-994D-4021-A283-9F449C0DB509}" type="datetimeFigureOut">
               <a:rPr lang="en-US" dirty="0"/>
-              <a:t>9/15/2026</a:t>
+              <a:t>9/18/2026</a:t>
             </a:fld>
             <a:endParaRPr lang="en-US" dirty="0"/>
           </a:p>
@@ -3670,7 +3677,7 @@
           <a:p>
             <a:fld id="{3CBBBB78-C96F-47B7-AB17-D852CA960AC9}" type="datetimeFigureOut">
               <a:rPr lang="en-US" dirty="0"/>
-              <a:t>9/15/2026</a:t>
+              <a:t>9/18/2026</a:t>
             </a:fld>
             <a:endParaRPr lang="en-US" dirty="0"/>
           </a:p>
@@ -3978,7 +3985,7 @@
           <a:p>
             <a:fld id="{1FA3F48C-C7C6-4055-9F49-3777875E72AE}" type="datetimeFigureOut">
               <a:rPr lang="en-US" dirty="0"/>
-              <a:t>9/15/2026</a:t>
+              <a:t>9/18/2026</a:t>
             </a:fld>
             <a:endParaRPr lang="en-US" dirty="0"/>
           </a:p>
@@ -4237,7 +4244,7 @@
           <a:p>
             <a:fld id="{6178E61D-D431-422C-9764-11DAFE33AB63}" type="datetimeFigureOut">
               <a:rPr lang="en-US" dirty="0"/>
-              <a:t>9/15/2026</a:t>
+              <a:t>9/18/2026</a:t>
             </a:fld>
             <a:endParaRPr lang="en-US" dirty="0"/>
           </a:p>
@@ -4556,7 +4563,7 @@
           <a:p>
             <a:fld id="{12DE42F4-6EEF-4EF7-8ED4-2208F0F89A08}" type="datetimeFigureOut">
               <a:rPr lang="en-US" dirty="0"/>
-              <a:t>9/15/2026</a:t>
+              <a:t>9/18/2026</a:t>
             </a:fld>
             <a:endParaRPr lang="en-US" dirty="0"/>
           </a:p>
@@ -4940,7 +4947,7 @@
           <a:p>
             <a:fld id="{30578ACC-22D6-47C1-A373-4FD133E34F3C}" type="datetimeFigureOut">
               <a:rPr lang="en-US" dirty="0"/>
-              <a:t>9/15/2026</a:t>
+              <a:t>9/18/2026</a:t>
             </a:fld>
             <a:endParaRPr lang="en-US" dirty="0"/>
           </a:p>
@@ -5311,7 +5318,7 @@
           <a:p>
             <a:fld id="{4E5A6C69-6797-4E8A-BF37-F2C3751466E9}" type="datetimeFigureOut">
               <a:rPr lang="en-US" dirty="0"/>
-              <a:t>9/15/2026</a:t>
+              <a:t>9/18/2026</a:t>
             </a:fld>
             <a:endParaRPr lang="en-US" dirty="0"/>
           </a:p>
@@ -5812,7 +5819,7 @@
           <a:p>
             <a:fld id="{D82014A1-A632-4878-A0D3-F52BA7563730}" type="datetimeFigureOut">
               <a:rPr lang="en-US" dirty="0"/>
-              <a:t>9/15/2026</a:t>
+              <a:t>9/18/2026</a:t>
             </a:fld>
             <a:endParaRPr lang="en-US" dirty="0"/>
           </a:p>
@@ -6064,7 +6071,7 @@
           <a:p>
             <a:fld id="{CE99F462-093F-4566-844B-4C71F2739DA5}" type="datetimeFigureOut">
               <a:rPr lang="en-US" dirty="0"/>
-              <a:t>9/15/2026</a:t>
+              <a:t>9/18/2026</a:t>
             </a:fld>
             <a:endParaRPr lang="en-US" dirty="0"/>
           </a:p>
@@ -6222,7 +6229,7 @@
           <a:p>
             <a:fld id="{3D24A7AC-904D-4781-85BA-7D10C17ED021}" type="datetimeFigureOut">
               <a:rPr lang="en-US" dirty="0"/>
-              <a:t>9/15/2026</a:t>
+              <a:t>9/18/2026</a:t>
             </a:fld>
             <a:endParaRPr lang="en-US" dirty="0"/>
           </a:p>
@@ -6607,7 +6614,7 @@
           <a:p>
             <a:fld id="{E331444B-B92B-4E27-8C94-BB93EAF5CB18}" type="datetimeFigureOut">
               <a:rPr lang="en-US" dirty="0"/>
-              <a:t>9/15/2026</a:t>
+              <a:t>9/18/2026</a:t>
             </a:fld>
             <a:endParaRPr lang="en-US" dirty="0"/>
           </a:p>
@@ -7011,7 +7018,7 @@
           <a:p>
             <a:fld id="{363EFA5E-FA76-400D-B3DC-F0BA90E6D107}" type="datetimeFigureOut">
               <a:rPr lang="en-US" dirty="0"/>
-              <a:t>9/15/2026</a:t>
+              <a:t>9/18/2026</a:t>
             </a:fld>
             <a:endParaRPr lang="en-US" dirty="0"/>
           </a:p>
@@ -7250,7 +7257,7 @@
           <a:p>
             <a:fld id="{9D6E9DEC-419B-4CC5-A080-3B06BD5A8291}" type="datetimeFigureOut">
               <a:rPr lang="en-US" dirty="0"/>
-              <a:t>9/15/2026</a:t>
+              <a:t>9/18/2026</a:t>
             </a:fld>
             <a:endParaRPr lang="en-US" dirty="0"/>
           </a:p>
@@ -7834,7 +7841,7 @@
         </p:nvSpPr>
         <p:spPr>
           <a:xfrm>
-            <a:off x="1283520" y="485752"/>
+            <a:off x="1254584" y="396180"/>
             <a:ext cx="9624960" cy="1080938"/>
           </a:xfrm>
         </p:spPr>
@@ -7871,7 +7878,7 @@
         </p:nvSpPr>
         <p:spPr>
           <a:xfrm>
-            <a:off x="1021315" y="1834166"/>
+            <a:off x="1015145" y="5070300"/>
             <a:ext cx="3070034" cy="576262"/>
           </a:xfrm>
         </p:spPr>
@@ -7905,7 +7912,7 @@
         </p:nvSpPr>
         <p:spPr>
           <a:xfrm>
-            <a:off x="4555331" y="1834166"/>
+            <a:off x="4564380" y="5070300"/>
             <a:ext cx="3063240" cy="576262"/>
           </a:xfrm>
         </p:spPr>
@@ -7939,7 +7946,7 @@
         </p:nvSpPr>
         <p:spPr>
           <a:xfrm>
-            <a:off x="8077703" y="1834166"/>
+            <a:off x="8143498" y="5070300"/>
             <a:ext cx="3070025" cy="576262"/>
           </a:xfrm>
         </p:spPr>
@@ -7955,246 +7962,313 @@
           </a:p>
         </p:txBody>
       </p:sp>
-      <p:pic>
-        <p:nvPicPr>
-          <p:cNvPr id="1034" name="Picture 10" descr="THE BLACK BOX Online | Franklin MA">
+      <p:grpSp>
+        <p:nvGrpSpPr>
+          <p:cNvPr id="8" name="Csoportba foglalás 7">
             <a:extLst>
               <a:ext uri="{FF2B5EF4-FFF2-40B4-BE49-F238E27FC236}">
-                <a16:creationId xmlns:a16="http://schemas.microsoft.com/office/drawing/2014/main" id="{DD24A3D6-3D05-45BF-8D2F-7BCA29586E7B}"/>
+                <a16:creationId xmlns:a16="http://schemas.microsoft.com/office/drawing/2014/main" id="{FB03B723-D97D-4AC3-80F4-16428E4AD9B7}"/>
               </a:ext>
             </a:extLst>
           </p:cNvPr>
-          <p:cNvPicPr>
-            <a:picLocks noChangeAspect="1" noChangeArrowheads="1"/>
-          </p:cNvPicPr>
+          <p:cNvGrpSpPr/>
           <p:nvPr/>
-        </p:nvPicPr>
-        <p:blipFill rotWithShape="1">
-          <a:blip r:embed="rId3">
+        </p:nvGrpSpPr>
+        <p:grpSpPr>
+          <a:xfrm>
+            <a:off x="1560656" y="2595197"/>
+            <a:ext cx="1991352" cy="1983581"/>
+            <a:chOff x="1560656" y="2595197"/>
+            <a:chExt cx="1991352" cy="1983581"/>
+          </a:xfrm>
+        </p:grpSpPr>
+        <p:pic>
+          <p:nvPicPr>
+            <p:cNvPr id="1034" name="Picture 10" descr="THE BLACK BOX Online | Franklin MA">
+              <a:hlinkClick r:id="rId3" action="ppaction://hlinksldjump"/>
+              <a:extLst>
+                <a:ext uri="{FF2B5EF4-FFF2-40B4-BE49-F238E27FC236}">
+                  <a16:creationId xmlns:a16="http://schemas.microsoft.com/office/drawing/2014/main" id="{DD24A3D6-3D05-45BF-8D2F-7BCA29586E7B}"/>
+                </a:ext>
+              </a:extLst>
+            </p:cNvPr>
+            <p:cNvPicPr>
+              <a:picLocks noChangeAspect="1" noChangeArrowheads="1"/>
+            </p:cNvPicPr>
+            <p:nvPr/>
+          </p:nvPicPr>
+          <p:blipFill rotWithShape="1">
+            <a:blip r:embed="rId4">
+              <a:extLst>
+                <a:ext uri="{28A0092B-C50C-407E-A947-70E740481C1C}">
+                  <a14:useLocalDpi xmlns:a14="http://schemas.microsoft.com/office/drawing/2010/main" val="0"/>
+                </a:ext>
+              </a:extLst>
+            </a:blip>
+            <a:srcRect l="22474" t="21676" r="22508" b="22459"/>
+            <a:stretch/>
+          </p:blipFill>
+          <p:spPr bwMode="auto">
+            <a:xfrm>
+              <a:off x="1560656" y="2595197"/>
+              <a:ext cx="1991352" cy="1983581"/>
+            </a:xfrm>
+            <a:prstGeom prst="rect">
+              <a:avLst/>
+            </a:prstGeom>
+            <a:noFill/>
             <a:extLst>
-              <a:ext uri="{28A0092B-C50C-407E-A947-70E740481C1C}">
-                <a14:useLocalDpi xmlns:a14="http://schemas.microsoft.com/office/drawing/2010/main" val="0"/>
+              <a:ext uri="{909E8E84-426E-40DD-AFC4-6F175D3DCCD1}">
+                <a14:hiddenFill xmlns:a14="http://schemas.microsoft.com/office/drawing/2010/main">
+                  <a:solidFill>
+                    <a:srgbClr val="FFFFFF"/>
+                  </a:solidFill>
+                </a14:hiddenFill>
               </a:ext>
             </a:extLst>
-          </a:blip>
-          <a:srcRect l="22474" t="21676" r="22508" b="22459"/>
-          <a:stretch/>
-        </p:blipFill>
-        <p:spPr bwMode="auto">
-          <a:xfrm>
-            <a:off x="1560656" y="2595197"/>
-            <a:ext cx="1991352" cy="1983581"/>
-          </a:xfrm>
-          <a:prstGeom prst="rect">
-            <a:avLst/>
-          </a:prstGeom>
-          <a:noFill/>
-          <a:extLst>
-            <a:ext uri="{909E8E84-426E-40DD-AFC4-6F175D3DCCD1}">
-              <a14:hiddenFill xmlns:a14="http://schemas.microsoft.com/office/drawing/2010/main">
-                <a:solidFill>
-                  <a:srgbClr val="FFFFFF"/>
-                </a:solidFill>
-              </a14:hiddenFill>
-            </a:ext>
-          </a:extLst>
-        </p:spPr>
-      </p:pic>
-      <p:pic>
-        <p:nvPicPr>
-          <p:cNvPr id="17" name="Picture 10" descr="THE BLACK BOX Online | Franklin MA">
+          </p:spPr>
+        </p:pic>
+        <p:sp>
+          <p:nvSpPr>
+            <p:cNvPr id="11" name="Szövegdoboz 10">
+              <a:extLst>
+                <a:ext uri="{FF2B5EF4-FFF2-40B4-BE49-F238E27FC236}">
+                  <a16:creationId xmlns:a16="http://schemas.microsoft.com/office/drawing/2014/main" id="{A28E9EC7-9021-44EB-9EEA-2CC07336E267}"/>
+                </a:ext>
+              </a:extLst>
+            </p:cNvPr>
+            <p:cNvSpPr txBox="1"/>
+            <p:nvPr/>
+          </p:nvSpPr>
+          <p:spPr>
+            <a:xfrm>
+              <a:off x="2150917" y="2771379"/>
+              <a:ext cx="798491" cy="1631216"/>
+            </a:xfrm>
+            <a:prstGeom prst="rect">
+              <a:avLst/>
+            </a:prstGeom>
+            <a:noFill/>
+          </p:spPr>
+          <p:txBody>
+            <a:bodyPr wrap="square" rtlCol="0">
+              <a:spAutoFit/>
+            </a:bodyPr>
+            <a:lstStyle/>
+            <a:p>
+              <a:r>
+                <a:rPr lang="hu-HU" sz="10000" dirty="0"/>
+                <a:t>1</a:t>
+              </a:r>
+            </a:p>
+          </p:txBody>
+        </p:sp>
+      </p:grpSp>
+      <p:grpSp>
+        <p:nvGrpSpPr>
+          <p:cNvPr id="3" name="Csoportba foglalás 2">
             <a:extLst>
               <a:ext uri="{FF2B5EF4-FFF2-40B4-BE49-F238E27FC236}">
-                <a16:creationId xmlns:a16="http://schemas.microsoft.com/office/drawing/2014/main" id="{D8B4BA7C-72B5-40F3-AF55-8FFAFFE467EC}"/>
+                <a16:creationId xmlns:a16="http://schemas.microsoft.com/office/drawing/2014/main" id="{3E0B2E2B-B854-4B25-AEDB-527CCDB972A2}"/>
               </a:ext>
             </a:extLst>
           </p:cNvPr>
-          <p:cNvPicPr>
-            <a:picLocks noChangeAspect="1" noChangeArrowheads="1"/>
-          </p:cNvPicPr>
+          <p:cNvGrpSpPr/>
           <p:nvPr/>
-        </p:nvPicPr>
-        <p:blipFill rotWithShape="1">
-          <a:blip r:embed="rId3">
+        </p:nvGrpSpPr>
+        <p:grpSpPr>
+          <a:xfrm>
+            <a:off x="5100324" y="2556794"/>
+            <a:ext cx="1991352" cy="2021984"/>
+            <a:chOff x="5100324" y="2556794"/>
+            <a:chExt cx="1991352" cy="2021984"/>
+          </a:xfrm>
+        </p:grpSpPr>
+        <p:pic>
+          <p:nvPicPr>
+            <p:cNvPr id="17" name="Picture 10" descr="THE BLACK BOX Online | Franklin MA">
+              <a:hlinkClick r:id="rId5" action="ppaction://hlinksldjump"/>
+              <a:extLst>
+                <a:ext uri="{FF2B5EF4-FFF2-40B4-BE49-F238E27FC236}">
+                  <a16:creationId xmlns:a16="http://schemas.microsoft.com/office/drawing/2014/main" id="{D8B4BA7C-72B5-40F3-AF55-8FFAFFE467EC}"/>
+                </a:ext>
+              </a:extLst>
+            </p:cNvPr>
+            <p:cNvPicPr>
+              <a:picLocks noChangeAspect="1" noChangeArrowheads="1"/>
+            </p:cNvPicPr>
+            <p:nvPr/>
+          </p:nvPicPr>
+          <p:blipFill rotWithShape="1">
+            <a:blip r:embed="rId4">
+              <a:extLst>
+                <a:ext uri="{28A0092B-C50C-407E-A947-70E740481C1C}">
+                  <a14:useLocalDpi xmlns:a14="http://schemas.microsoft.com/office/drawing/2010/main" val="0"/>
+                </a:ext>
+              </a:extLst>
+            </a:blip>
+            <a:srcRect l="22474" t="21676" r="22508" b="22459"/>
+            <a:stretch/>
+          </p:blipFill>
+          <p:spPr bwMode="auto">
+            <a:xfrm>
+              <a:off x="5100324" y="2556794"/>
+              <a:ext cx="1991352" cy="2021984"/>
+            </a:xfrm>
+            <a:prstGeom prst="rect">
+              <a:avLst/>
+            </a:prstGeom>
+            <a:noFill/>
             <a:extLst>
-              <a:ext uri="{28A0092B-C50C-407E-A947-70E740481C1C}">
-                <a14:useLocalDpi xmlns:a14="http://schemas.microsoft.com/office/drawing/2010/main" val="0"/>
+              <a:ext uri="{909E8E84-426E-40DD-AFC4-6F175D3DCCD1}">
+                <a14:hiddenFill xmlns:a14="http://schemas.microsoft.com/office/drawing/2010/main">
+                  <a:solidFill>
+                    <a:srgbClr val="FFFFFF"/>
+                  </a:solidFill>
+                </a14:hiddenFill>
               </a:ext>
             </a:extLst>
-          </a:blip>
-          <a:srcRect l="22474" t="21676" r="22508" b="22459"/>
-          <a:stretch/>
-        </p:blipFill>
-        <p:spPr bwMode="auto">
-          <a:xfrm>
-            <a:off x="5100324" y="2556794"/>
-            <a:ext cx="1991352" cy="2021984"/>
-          </a:xfrm>
-          <a:prstGeom prst="rect">
-            <a:avLst/>
-          </a:prstGeom>
-          <a:noFill/>
-          <a:extLst>
-            <a:ext uri="{909E8E84-426E-40DD-AFC4-6F175D3DCCD1}">
-              <a14:hiddenFill xmlns:a14="http://schemas.microsoft.com/office/drawing/2010/main">
-                <a:solidFill>
-                  <a:srgbClr val="FFFFFF"/>
-                </a:solidFill>
-              </a14:hiddenFill>
-            </a:ext>
-          </a:extLst>
-        </p:spPr>
-      </p:pic>
-      <p:pic>
-        <p:nvPicPr>
-          <p:cNvPr id="18" name="Picture 10" descr="THE BLACK BOX Online | Franklin MA">
+          </p:spPr>
+        </p:pic>
+        <p:sp>
+          <p:nvSpPr>
+            <p:cNvPr id="20" name="Szövegdoboz 19">
+              <a:extLst>
+                <a:ext uri="{FF2B5EF4-FFF2-40B4-BE49-F238E27FC236}">
+                  <a16:creationId xmlns:a16="http://schemas.microsoft.com/office/drawing/2014/main" id="{BC5F023D-F40E-4633-A883-21AD75679EB5}"/>
+                </a:ext>
+              </a:extLst>
+            </p:cNvPr>
+            <p:cNvSpPr txBox="1"/>
+            <p:nvPr/>
+          </p:nvSpPr>
+          <p:spPr>
+            <a:xfrm>
+              <a:off x="5687705" y="2677904"/>
+              <a:ext cx="798491" cy="1631216"/>
+            </a:xfrm>
+            <a:prstGeom prst="rect">
+              <a:avLst/>
+            </a:prstGeom>
+            <a:noFill/>
+          </p:spPr>
+          <p:txBody>
+            <a:bodyPr wrap="square" rtlCol="0">
+              <a:spAutoFit/>
+            </a:bodyPr>
+            <a:lstStyle/>
+            <a:p>
+              <a:r>
+                <a:rPr lang="hu-HU" sz="10000" dirty="0"/>
+                <a:t>2</a:t>
+              </a:r>
+            </a:p>
+          </p:txBody>
+        </p:sp>
+      </p:grpSp>
+      <p:grpSp>
+        <p:nvGrpSpPr>
+          <p:cNvPr id="9" name="Csoportba foglalás 8">
             <a:extLst>
               <a:ext uri="{FF2B5EF4-FFF2-40B4-BE49-F238E27FC236}">
-                <a16:creationId xmlns:a16="http://schemas.microsoft.com/office/drawing/2014/main" id="{7BC62E97-7A17-4020-A9FD-A8F6E5F0A398}"/>
+                <a16:creationId xmlns:a16="http://schemas.microsoft.com/office/drawing/2014/main" id="{3D539EFB-1AC9-4082-BA51-83B09F75B768}"/>
               </a:ext>
             </a:extLst>
           </p:cNvPr>
-          <p:cNvPicPr>
-            <a:picLocks noChangeAspect="1" noChangeArrowheads="1"/>
-          </p:cNvPicPr>
+          <p:cNvGrpSpPr/>
           <p:nvPr/>
-        </p:nvPicPr>
-        <p:blipFill rotWithShape="1">
-          <a:blip r:embed="rId3">
+        </p:nvGrpSpPr>
+        <p:grpSpPr>
+          <a:xfrm>
+            <a:off x="8682836" y="2556794"/>
+            <a:ext cx="1991352" cy="2021984"/>
+            <a:chOff x="8682836" y="2556794"/>
+            <a:chExt cx="1991352" cy="2021984"/>
+          </a:xfrm>
+        </p:grpSpPr>
+        <p:pic>
+          <p:nvPicPr>
+            <p:cNvPr id="18" name="Picture 10" descr="THE BLACK BOX Online | Franklin MA">
+              <a:hlinkClick r:id="" action="ppaction://hlinkshowjump?jump=endshow"/>
+              <a:extLst>
+                <a:ext uri="{FF2B5EF4-FFF2-40B4-BE49-F238E27FC236}">
+                  <a16:creationId xmlns:a16="http://schemas.microsoft.com/office/drawing/2014/main" id="{7BC62E97-7A17-4020-A9FD-A8F6E5F0A398}"/>
+                </a:ext>
+              </a:extLst>
+            </p:cNvPr>
+            <p:cNvPicPr>
+              <a:picLocks noChangeAspect="1" noChangeArrowheads="1"/>
+            </p:cNvPicPr>
+            <p:nvPr/>
+          </p:nvPicPr>
+          <p:blipFill rotWithShape="1">
+            <a:blip r:embed="rId4">
+              <a:extLst>
+                <a:ext uri="{28A0092B-C50C-407E-A947-70E740481C1C}">
+                  <a14:useLocalDpi xmlns:a14="http://schemas.microsoft.com/office/drawing/2010/main" val="0"/>
+                </a:ext>
+              </a:extLst>
+            </a:blip>
+            <a:srcRect l="22474" t="21676" r="22508" b="22459"/>
+            <a:stretch/>
+          </p:blipFill>
+          <p:spPr bwMode="auto">
+            <a:xfrm>
+              <a:off x="8682836" y="2556794"/>
+              <a:ext cx="1991352" cy="2021984"/>
+            </a:xfrm>
+            <a:prstGeom prst="rect">
+              <a:avLst/>
+            </a:prstGeom>
+            <a:noFill/>
             <a:extLst>
-              <a:ext uri="{28A0092B-C50C-407E-A947-70E740481C1C}">
-                <a14:useLocalDpi xmlns:a14="http://schemas.microsoft.com/office/drawing/2010/main" val="0"/>
+              <a:ext uri="{909E8E84-426E-40DD-AFC4-6F175D3DCCD1}">
+                <a14:hiddenFill xmlns:a14="http://schemas.microsoft.com/office/drawing/2010/main">
+                  <a:solidFill>
+                    <a:srgbClr val="FFFFFF"/>
+                  </a:solidFill>
+                </a14:hiddenFill>
               </a:ext>
             </a:extLst>
-          </a:blip>
-          <a:srcRect l="22474" t="21676" r="22508" b="22459"/>
-          <a:stretch/>
-        </p:blipFill>
-        <p:spPr bwMode="auto">
-          <a:xfrm>
-            <a:off x="8682836" y="2556794"/>
-            <a:ext cx="1991352" cy="2021984"/>
-          </a:xfrm>
-          <a:prstGeom prst="rect">
-            <a:avLst/>
-          </a:prstGeom>
-          <a:noFill/>
-          <a:extLst>
-            <a:ext uri="{909E8E84-426E-40DD-AFC4-6F175D3DCCD1}">
-              <a14:hiddenFill xmlns:a14="http://schemas.microsoft.com/office/drawing/2010/main">
-                <a:solidFill>
-                  <a:srgbClr val="FFFFFF"/>
-                </a:solidFill>
-              </a14:hiddenFill>
-            </a:ext>
-          </a:extLst>
-        </p:spPr>
-      </p:pic>
-      <p:sp>
-        <p:nvSpPr>
-          <p:cNvPr id="11" name="Szövegdoboz 10">
-            <a:extLst>
-              <a:ext uri="{FF2B5EF4-FFF2-40B4-BE49-F238E27FC236}">
-                <a16:creationId xmlns:a16="http://schemas.microsoft.com/office/drawing/2014/main" id="{A28E9EC7-9021-44EB-9EEA-2CC07336E267}"/>
-              </a:ext>
-            </a:extLst>
-          </p:cNvPr>
-          <p:cNvSpPr txBox="1"/>
-          <p:nvPr/>
-        </p:nvSpPr>
-        <p:spPr>
-          <a:xfrm>
-            <a:off x="2150917" y="2771379"/>
-            <a:ext cx="798491" cy="1631216"/>
-          </a:xfrm>
-          <a:prstGeom prst="rect">
-            <a:avLst/>
-          </a:prstGeom>
-          <a:noFill/>
-        </p:spPr>
-        <p:txBody>
-          <a:bodyPr wrap="square" rtlCol="0">
-            <a:spAutoFit/>
-          </a:bodyPr>
-          <a:lstStyle/>
-          <a:p>
-            <a:r>
-              <a:rPr lang="hu-HU" sz="10000" dirty="0"/>
-              <a:t>1</a:t>
-            </a:r>
-          </a:p>
-        </p:txBody>
-      </p:sp>
-      <p:sp>
-        <p:nvSpPr>
-          <p:cNvPr id="20" name="Szövegdoboz 19">
-            <a:extLst>
-              <a:ext uri="{FF2B5EF4-FFF2-40B4-BE49-F238E27FC236}">
-                <a16:creationId xmlns:a16="http://schemas.microsoft.com/office/drawing/2014/main" id="{BC5F023D-F40E-4633-A883-21AD75679EB5}"/>
-              </a:ext>
-            </a:extLst>
-          </p:cNvPr>
-          <p:cNvSpPr txBox="1"/>
-          <p:nvPr/>
-        </p:nvSpPr>
-        <p:spPr>
-          <a:xfrm>
-            <a:off x="5687705" y="2677904"/>
-            <a:ext cx="798491" cy="1631216"/>
-          </a:xfrm>
-          <a:prstGeom prst="rect">
-            <a:avLst/>
-          </a:prstGeom>
-          <a:noFill/>
-        </p:spPr>
-        <p:txBody>
-          <a:bodyPr wrap="square" rtlCol="0">
-            <a:spAutoFit/>
-          </a:bodyPr>
-          <a:lstStyle/>
-          <a:p>
-            <a:r>
-              <a:rPr lang="hu-HU" sz="10000" dirty="0"/>
-              <a:t>2</a:t>
-            </a:r>
-          </a:p>
-        </p:txBody>
-      </p:sp>
-      <p:sp>
-        <p:nvSpPr>
-          <p:cNvPr id="21" name="Szövegdoboz 20">
-            <a:extLst>
-              <a:ext uri="{FF2B5EF4-FFF2-40B4-BE49-F238E27FC236}">
-                <a16:creationId xmlns:a16="http://schemas.microsoft.com/office/drawing/2014/main" id="{704E175D-B239-46D3-9BAB-9861D14726A7}"/>
-              </a:ext>
-            </a:extLst>
-          </p:cNvPr>
-          <p:cNvSpPr txBox="1"/>
-          <p:nvPr/>
-        </p:nvSpPr>
-        <p:spPr>
-          <a:xfrm>
-            <a:off x="9279266" y="2673596"/>
-            <a:ext cx="798491" cy="1631216"/>
-          </a:xfrm>
-          <a:prstGeom prst="rect">
-            <a:avLst/>
-          </a:prstGeom>
-          <a:noFill/>
-        </p:spPr>
-        <p:txBody>
-          <a:bodyPr wrap="square" rtlCol="0">
-            <a:spAutoFit/>
-          </a:bodyPr>
-          <a:lstStyle/>
-          <a:p>
-            <a:r>
-              <a:rPr lang="hu-HU" sz="10000" dirty="0"/>
-              <a:t>3</a:t>
-            </a:r>
-          </a:p>
-        </p:txBody>
-      </p:sp>
+          </p:spPr>
+        </p:pic>
+        <p:sp>
+          <p:nvSpPr>
+            <p:cNvPr id="21" name="Szövegdoboz 20">
+              <a:hlinkClick r:id="" action="ppaction://hlinkshowjump?jump=endshow"/>
+              <a:extLst>
+                <a:ext uri="{FF2B5EF4-FFF2-40B4-BE49-F238E27FC236}">
+                  <a16:creationId xmlns:a16="http://schemas.microsoft.com/office/drawing/2014/main" id="{704E175D-B239-46D3-9BAB-9861D14726A7}"/>
+                </a:ext>
+              </a:extLst>
+            </p:cNvPr>
+            <p:cNvSpPr txBox="1"/>
+            <p:nvPr/>
+          </p:nvSpPr>
+          <p:spPr>
+            <a:xfrm>
+              <a:off x="9279266" y="2673596"/>
+              <a:ext cx="798491" cy="1631216"/>
+            </a:xfrm>
+            <a:prstGeom prst="rect">
+              <a:avLst/>
+            </a:prstGeom>
+            <a:noFill/>
+          </p:spPr>
+          <p:txBody>
+            <a:bodyPr wrap="square" rtlCol="0">
+              <a:spAutoFit/>
+            </a:bodyPr>
+            <a:lstStyle/>
+            <a:p>
+              <a:r>
+                <a:rPr lang="hu-HU" sz="10000" dirty="0"/>
+                <a:t>3</a:t>
+              </a:r>
+            </a:p>
+          </p:txBody>
+        </p:sp>
+      </p:grpSp>
     </p:spTree>
     <p:extLst>
       <p:ext uri="{BB962C8B-B14F-4D97-AF65-F5344CB8AC3E}">
@@ -8246,7 +8320,10 @@
           <a:bodyPr/>
           <a:lstStyle/>
           <a:p>
-            <a:endParaRPr lang="hu-HU"/>
+            <a:r>
+              <a:rPr lang="hu-HU" dirty="0"/>
+              <a:t>Megye Adatai</a:t>
+            </a:r>
           </a:p>
         </p:txBody>
       </p:sp>
@@ -8271,7 +8348,10 @@
           <a:bodyPr/>
           <a:lstStyle/>
           <a:p>
-            <a:endParaRPr lang="hu-HU"/>
+            <a:r>
+              <a:rPr lang="hu-HU" dirty="0"/>
+              <a:t>Főbb funkciója</a:t>
+            </a:r>
           </a:p>
         </p:txBody>
       </p:sp>
@@ -8291,119 +8371,466 @@
             <p:ph type="body" sz="half" idx="15"/>
           </p:nvPr>
         </p:nvSpPr>
-        <p:spPr/>
-        <p:txBody>
-          <a:bodyPr/>
+        <p:spPr>
+          <a:xfrm>
+            <a:off x="680322" y="3022673"/>
+            <a:ext cx="5192444" cy="2913513"/>
+          </a:xfrm>
+        </p:spPr>
+        <p:txBody>
+          <a:bodyPr>
+            <a:normAutofit/>
+          </a:bodyPr>
           <a:lstStyle/>
           <a:p>
-            <a:endParaRPr lang="hu-HU"/>
-          </a:p>
-        </p:txBody>
-      </p:sp>
-      <p:sp>
-        <p:nvSpPr>
-          <p:cNvPr id="5" name="Szöveg helye 4">
+            <a:pPr marL="342900" indent="-342900">
+              <a:buFont typeface="Arial" panose="020B0604020202020204" pitchFamily="34" charset="0"/>
+              <a:buChar char="•"/>
+            </a:pPr>
+            <a:r>
+              <a:rPr lang="hu-HU" sz="2000" dirty="0"/>
+              <a:t>A kód egy függvény meghívásával lekérdezi a 2025-ös magyar népességi adatokat </a:t>
+            </a:r>
+            <a:r>
+              <a:rPr lang="hu-HU" sz="2000" dirty="0" err="1"/>
+              <a:t>megyénkénti</a:t>
+            </a:r>
+            <a:r>
+              <a:rPr lang="hu-HU" sz="2000" dirty="0"/>
+              <a:t> bontásban.</a:t>
+            </a:r>
+          </a:p>
+          <a:p>
+            <a:pPr marL="342900" indent="-342900">
+              <a:buFont typeface="Arial" panose="020B0604020202020204" pitchFamily="34" charset="0"/>
+              <a:buChar char="•"/>
+            </a:pPr>
+            <a:r>
+              <a:rPr lang="hu-HU" sz="2000" dirty="0"/>
+              <a:t>Meghatározza a megyékben található települések számát, az összlakosságot, valamint a városokban – a megyei jogú városokat és a megyeszékhelyeket is beleértve – élő lakosság számát.</a:t>
+            </a:r>
+          </a:p>
+        </p:txBody>
+      </p:sp>
+      <p:sp>
+        <p:nvSpPr>
+          <p:cNvPr id="9" name="Nyíl: balra mutató 8">
+            <a:hlinkClick r:id="rId2" action="ppaction://hlinksldjump"/>
             <a:extLst>
               <a:ext uri="{FF2B5EF4-FFF2-40B4-BE49-F238E27FC236}">
-                <a16:creationId xmlns:a16="http://schemas.microsoft.com/office/drawing/2014/main" id="{3F782E2D-CE31-4E43-B634-8F4EDDBCA942}"/>
+                <a16:creationId xmlns:a16="http://schemas.microsoft.com/office/drawing/2014/main" id="{6FD7BC93-C507-46AC-AF61-E5BF7C83496D}"/>
               </a:ext>
             </a:extLst>
           </p:cNvPr>
-          <p:cNvSpPr>
-            <a:spLocks noGrp="1"/>
-          </p:cNvSpPr>
-          <p:nvPr>
-            <p:ph type="body" sz="quarter" idx="3"/>
-          </p:nvPr>
-        </p:nvSpPr>
-        <p:spPr/>
-        <p:txBody>
-          <a:bodyPr/>
+          <p:cNvSpPr/>
+          <p:nvPr/>
+        </p:nvSpPr>
+        <p:spPr>
+          <a:xfrm>
+            <a:off x="10740980" y="753228"/>
+            <a:ext cx="1210614" cy="1080938"/>
+          </a:xfrm>
+          <a:prstGeom prst="leftArrow">
+            <a:avLst/>
+          </a:prstGeom>
+        </p:spPr>
+        <p:style>
+          <a:lnRef idx="2">
+            <a:schemeClr val="accent1">
+              <a:shade val="50000"/>
+            </a:schemeClr>
+          </a:lnRef>
+          <a:fillRef idx="1">
+            <a:schemeClr val="accent1"/>
+          </a:fillRef>
+          <a:effectRef idx="0">
+            <a:schemeClr val="accent1"/>
+          </a:effectRef>
+          <a:fontRef idx="minor">
+            <a:schemeClr val="lt1"/>
+          </a:fontRef>
+        </p:style>
+        <p:txBody>
+          <a:bodyPr rtlCol="0" anchor="ctr"/>
           <a:lstStyle/>
           <a:p>
+            <a:pPr algn="ctr"/>
             <a:endParaRPr lang="hu-HU"/>
           </a:p>
         </p:txBody>
       </p:sp>
-      <p:sp>
-        <p:nvSpPr>
-          <p:cNvPr id="6" name="Szöveg helye 5">
+      <p:pic>
+        <p:nvPicPr>
+          <p:cNvPr id="12" name="Kép 11">
             <a:extLst>
               <a:ext uri="{FF2B5EF4-FFF2-40B4-BE49-F238E27FC236}">
-                <a16:creationId xmlns:a16="http://schemas.microsoft.com/office/drawing/2014/main" id="{B4BF5E79-471D-43C6-ACF0-9F582707602E}"/>
+                <a16:creationId xmlns:a16="http://schemas.microsoft.com/office/drawing/2014/main" id="{9E7ADA4E-01C3-468D-91AE-EA97F986A00D}"/>
               </a:ext>
             </a:extLst>
           </p:cNvPr>
-          <p:cNvSpPr>
-            <a:spLocks noGrp="1"/>
-          </p:cNvSpPr>
-          <p:nvPr>
-            <p:ph type="body" sz="half" idx="16"/>
-          </p:nvPr>
-        </p:nvSpPr>
-        <p:spPr/>
-        <p:txBody>
-          <a:bodyPr/>
-          <a:lstStyle/>
-          <a:p>
-            <a:endParaRPr lang="hu-HU"/>
-          </a:p>
-        </p:txBody>
-      </p:sp>
-      <p:sp>
-        <p:nvSpPr>
-          <p:cNvPr id="7" name="Szöveg helye 6">
-            <a:extLst>
-              <a:ext uri="{FF2B5EF4-FFF2-40B4-BE49-F238E27FC236}">
-                <a16:creationId xmlns:a16="http://schemas.microsoft.com/office/drawing/2014/main" id="{72D9982D-5F7F-41D1-837F-B9359DC89A47}"/>
-              </a:ext>
-            </a:extLst>
-          </p:cNvPr>
-          <p:cNvSpPr>
-            <a:spLocks noGrp="1"/>
-          </p:cNvSpPr>
-          <p:nvPr>
-            <p:ph type="body" sz="quarter" idx="13"/>
-          </p:nvPr>
-        </p:nvSpPr>
-        <p:spPr/>
-        <p:txBody>
-          <a:bodyPr/>
-          <a:lstStyle/>
-          <a:p>
-            <a:endParaRPr lang="hu-HU"/>
-          </a:p>
-        </p:txBody>
-      </p:sp>
-      <p:sp>
-        <p:nvSpPr>
-          <p:cNvPr id="8" name="Szöveg helye 7">
-            <a:extLst>
-              <a:ext uri="{FF2B5EF4-FFF2-40B4-BE49-F238E27FC236}">
-                <a16:creationId xmlns:a16="http://schemas.microsoft.com/office/drawing/2014/main" id="{D52456FA-AF94-4941-824D-54F7CCA34C05}"/>
-              </a:ext>
-            </a:extLst>
-          </p:cNvPr>
-          <p:cNvSpPr>
-            <a:spLocks noGrp="1"/>
-          </p:cNvSpPr>
-          <p:nvPr>
-            <p:ph type="body" sz="half" idx="17"/>
-          </p:nvPr>
-        </p:nvSpPr>
-        <p:spPr/>
-        <p:txBody>
-          <a:bodyPr/>
-          <a:lstStyle/>
-          <a:p>
-            <a:endParaRPr lang="hu-HU"/>
-          </a:p>
-        </p:txBody>
-      </p:sp>
+          <p:cNvPicPr>
+            <a:picLocks noChangeAspect="1"/>
+          </p:cNvPicPr>
+          <p:nvPr/>
+        </p:nvPicPr>
+        <p:blipFill>
+          <a:blip r:embed="rId3"/>
+          <a:stretch>
+            <a:fillRect/>
+          </a:stretch>
+        </p:blipFill>
+        <p:spPr>
+          <a:xfrm>
+            <a:off x="6096001" y="2152775"/>
+            <a:ext cx="5415678" cy="4518481"/>
+          </a:xfrm>
+          <a:prstGeom prst="rect">
+            <a:avLst/>
+          </a:prstGeom>
+        </p:spPr>
+      </p:pic>
     </p:spTree>
     <p:extLst>
       <p:ext uri="{BB962C8B-B14F-4D97-AF65-F5344CB8AC3E}">
         <p14:creationId xmlns:p14="http://schemas.microsoft.com/office/powerpoint/2010/main" val="3920310866"/>
+      </p:ext>
+    </p:extLst>
+  </p:cSld>
+  <p:clrMapOvr>
+    <a:masterClrMapping/>
+  </p:clrMapOvr>
+  <p:transition spd="slow">
+    <p:randomBar dir="vert"/>
+  </p:transition>
+</p:sld>
+</file>
+
+<file path=ppt/slides/slide4.xml><?xml version="1.0" encoding="utf-8"?>
+<p:sld xmlns:a="http://schemas.openxmlformats.org/drawingml/2006/main" xmlns:r="http://schemas.openxmlformats.org/officeDocument/2006/relationships" xmlns:p="http://schemas.openxmlformats.org/presentationml/2006/main">
+  <p:cSld>
+    <p:spTree>
+      <p:nvGrpSpPr>
+        <p:cNvPr id="1" name=""/>
+        <p:cNvGrpSpPr/>
+        <p:nvPr/>
+      </p:nvGrpSpPr>
+      <p:grpSpPr>
+        <a:xfrm>
+          <a:off x="0" y="0"/>
+          <a:ext cx="0" cy="0"/>
+          <a:chOff x="0" y="0"/>
+          <a:chExt cx="0" cy="0"/>
+        </a:xfrm>
+      </p:grpSpPr>
+      <p:sp>
+        <p:nvSpPr>
+          <p:cNvPr id="2" name="Cím 1">
+            <a:extLst>
+              <a:ext uri="{FF2B5EF4-FFF2-40B4-BE49-F238E27FC236}">
+                <a16:creationId xmlns:a16="http://schemas.microsoft.com/office/drawing/2014/main" id="{26073DA0-7ECC-4892-97A1-63CD4936837E}"/>
+              </a:ext>
+            </a:extLst>
+          </p:cNvPr>
+          <p:cNvSpPr>
+            <a:spLocks noGrp="1"/>
+          </p:cNvSpPr>
+          <p:nvPr>
+            <p:ph type="title"/>
+          </p:nvPr>
+        </p:nvSpPr>
+        <p:spPr/>
+        <p:txBody>
+          <a:bodyPr/>
+          <a:lstStyle/>
+          <a:p>
+            <a:r>
+              <a:rPr lang="hu-HU" dirty="0"/>
+              <a:t>Település Típusok</a:t>
+            </a:r>
+          </a:p>
+        </p:txBody>
+      </p:sp>
+      <p:sp>
+        <p:nvSpPr>
+          <p:cNvPr id="3" name="Szöveg helye 2">
+            <a:extLst>
+              <a:ext uri="{FF2B5EF4-FFF2-40B4-BE49-F238E27FC236}">
+                <a16:creationId xmlns:a16="http://schemas.microsoft.com/office/drawing/2014/main" id="{1049E1E2-43AE-4F60-81F6-1F3ED8245246}"/>
+              </a:ext>
+            </a:extLst>
+          </p:cNvPr>
+          <p:cNvSpPr>
+            <a:spLocks noGrp="1"/>
+          </p:cNvSpPr>
+          <p:nvPr>
+            <p:ph type="body" idx="1"/>
+          </p:nvPr>
+        </p:nvSpPr>
+        <p:spPr/>
+        <p:txBody>
+          <a:bodyPr/>
+          <a:lstStyle/>
+          <a:p>
+            <a:r>
+              <a:rPr lang="hu-HU" dirty="0"/>
+              <a:t>Főbb funkciója</a:t>
+            </a:r>
+          </a:p>
+        </p:txBody>
+      </p:sp>
+      <p:sp>
+        <p:nvSpPr>
+          <p:cNvPr id="4" name="Szöveg helye 3">
+            <a:extLst>
+              <a:ext uri="{FF2B5EF4-FFF2-40B4-BE49-F238E27FC236}">
+                <a16:creationId xmlns:a16="http://schemas.microsoft.com/office/drawing/2014/main" id="{AB63B231-31D7-4A01-B70E-D09D9EB945CC}"/>
+              </a:ext>
+            </a:extLst>
+          </p:cNvPr>
+          <p:cNvSpPr>
+            <a:spLocks noGrp="1"/>
+          </p:cNvSpPr>
+          <p:nvPr>
+            <p:ph type="body" sz="half" idx="15"/>
+          </p:nvPr>
+        </p:nvSpPr>
+        <p:spPr>
+          <a:xfrm>
+            <a:off x="680321" y="3022673"/>
+            <a:ext cx="5012141" cy="2913513"/>
+          </a:xfrm>
+        </p:spPr>
+        <p:txBody>
+          <a:bodyPr>
+            <a:normAutofit lnSpcReduction="10000"/>
+          </a:bodyPr>
+          <a:lstStyle/>
+          <a:p>
+            <a:pPr marL="342900" indent="-342900">
+              <a:buFont typeface="Arial" panose="020B0604020202020204" pitchFamily="34" charset="0"/>
+              <a:buChar char="•"/>
+            </a:pPr>
+            <a:r>
+              <a:rPr lang="hu-HU" sz="2000" dirty="0"/>
+              <a:t>A kódunk egy menüpont kiválasztásán keresztül lehetővé teszi a különböző településtípusok lekérdezését.</a:t>
+            </a:r>
+          </a:p>
+          <a:p>
+            <a:pPr marL="342900" indent="-342900">
+              <a:buFont typeface="Arial" panose="020B0604020202020204" pitchFamily="34" charset="0"/>
+              <a:buChar char="•"/>
+            </a:pPr>
+            <a:r>
+              <a:rPr lang="hu-HU" sz="2000" dirty="0"/>
+              <a:t>A településtípus kiválasztása után a program kilistázza az adott típushoz tartozó települések neveit és az ott élő emberek számát.</a:t>
+            </a:r>
+          </a:p>
+          <a:p>
+            <a:pPr marL="342900" indent="-342900">
+              <a:buFont typeface="Arial" panose="020B0604020202020204" pitchFamily="34" charset="0"/>
+              <a:buChar char="•"/>
+            </a:pPr>
+            <a:r>
+              <a:rPr lang="hu-HU" sz="2000" dirty="0"/>
+              <a:t>A listázás lapozással történik, így a képernyőn egyszerre csak annyi település jelenik meg, amennyi elfér.</a:t>
+            </a:r>
+          </a:p>
+        </p:txBody>
+      </p:sp>
+      <p:sp>
+        <p:nvSpPr>
+          <p:cNvPr id="9" name="Nyíl: balra mutató 8">
+            <a:hlinkClick r:id="rId2" action="ppaction://hlinksldjump"/>
+            <a:extLst>
+              <a:ext uri="{FF2B5EF4-FFF2-40B4-BE49-F238E27FC236}">
+                <a16:creationId xmlns:a16="http://schemas.microsoft.com/office/drawing/2014/main" id="{66770E06-53F3-4F24-9534-97DFDB3D5B5C}"/>
+              </a:ext>
+            </a:extLst>
+          </p:cNvPr>
+          <p:cNvSpPr/>
+          <p:nvPr/>
+        </p:nvSpPr>
+        <p:spPr>
+          <a:xfrm>
+            <a:off x="10740980" y="753228"/>
+            <a:ext cx="1210614" cy="1080938"/>
+          </a:xfrm>
+          <a:prstGeom prst="leftArrow">
+            <a:avLst/>
+          </a:prstGeom>
+        </p:spPr>
+        <p:style>
+          <a:lnRef idx="2">
+            <a:schemeClr val="accent1">
+              <a:shade val="50000"/>
+            </a:schemeClr>
+          </a:lnRef>
+          <a:fillRef idx="1">
+            <a:schemeClr val="accent1"/>
+          </a:fillRef>
+          <a:effectRef idx="0">
+            <a:schemeClr val="accent1"/>
+          </a:effectRef>
+          <a:fontRef idx="minor">
+            <a:schemeClr val="lt1"/>
+          </a:fontRef>
+        </p:style>
+        <p:txBody>
+          <a:bodyPr rtlCol="0" anchor="ctr"/>
+          <a:lstStyle/>
+          <a:p>
+            <a:pPr algn="ctr"/>
+            <a:endParaRPr lang="hu-HU"/>
+          </a:p>
+        </p:txBody>
+      </p:sp>
+    </p:spTree>
+    <p:extLst>
+      <p:ext uri="{BB962C8B-B14F-4D97-AF65-F5344CB8AC3E}">
+        <p14:creationId xmlns:p14="http://schemas.microsoft.com/office/powerpoint/2010/main" val="3897306475"/>
+      </p:ext>
+    </p:extLst>
+  </p:cSld>
+  <p:clrMapOvr>
+    <a:masterClrMapping/>
+  </p:clrMapOvr>
+  <p:transition spd="slow">
+    <p:randomBar dir="vert"/>
+  </p:transition>
+</p:sld>
+</file>
+
+<file path=ppt/slides/slide5.xml><?xml version="1.0" encoding="utf-8"?>
+<p:sld xmlns:a="http://schemas.openxmlformats.org/drawingml/2006/main" xmlns:r="http://schemas.openxmlformats.org/officeDocument/2006/relationships" xmlns:p="http://schemas.openxmlformats.org/presentationml/2006/main">
+  <p:cSld>
+    <p:spTree>
+      <p:nvGrpSpPr>
+        <p:cNvPr id="1" name=""/>
+        <p:cNvGrpSpPr/>
+        <p:nvPr/>
+      </p:nvGrpSpPr>
+      <p:grpSpPr>
+        <a:xfrm>
+          <a:off x="0" y="0"/>
+          <a:ext cx="0" cy="0"/>
+          <a:chOff x="0" y="0"/>
+          <a:chExt cx="0" cy="0"/>
+        </a:xfrm>
+      </p:grpSpPr>
+      <p:sp>
+        <p:nvSpPr>
+          <p:cNvPr id="3" name="Szöveg helye 2">
+            <a:extLst>
+              <a:ext uri="{FF2B5EF4-FFF2-40B4-BE49-F238E27FC236}">
+                <a16:creationId xmlns:a16="http://schemas.microsoft.com/office/drawing/2014/main" id="{6E100D1F-B145-45F7-9FAC-4C4D62636591}"/>
+              </a:ext>
+            </a:extLst>
+          </p:cNvPr>
+          <p:cNvSpPr>
+            <a:spLocks noGrp="1"/>
+          </p:cNvSpPr>
+          <p:nvPr>
+            <p:ph type="body" idx="1"/>
+          </p:nvPr>
+        </p:nvSpPr>
+        <p:spPr>
+          <a:xfrm>
+            <a:off x="680322" y="981871"/>
+            <a:ext cx="4027920" cy="623651"/>
+          </a:xfrm>
+        </p:spPr>
+        <p:txBody>
+          <a:bodyPr/>
+          <a:lstStyle/>
+          <a:p>
+            <a:r>
+              <a:rPr lang="hu-HU" sz="4400" dirty="0"/>
+              <a:t>Főmenü</a:t>
+            </a:r>
+          </a:p>
+        </p:txBody>
+      </p:sp>
+      <p:pic>
+        <p:nvPicPr>
+          <p:cNvPr id="18" name="Kép 17">
+            <a:extLst>
+              <a:ext uri="{FF2B5EF4-FFF2-40B4-BE49-F238E27FC236}">
+                <a16:creationId xmlns:a16="http://schemas.microsoft.com/office/drawing/2014/main" id="{5E8F07F5-D0F4-420D-9821-B9A922425366}"/>
+              </a:ext>
+            </a:extLst>
+          </p:cNvPr>
+          <p:cNvPicPr>
+            <a:picLocks noChangeAspect="1"/>
+          </p:cNvPicPr>
+          <p:nvPr/>
+        </p:nvPicPr>
+        <p:blipFill>
+          <a:blip r:embed="rId2"/>
+          <a:stretch>
+            <a:fillRect/>
+          </a:stretch>
+        </p:blipFill>
+        <p:spPr>
+          <a:xfrm>
+            <a:off x="2556968" y="2123765"/>
+            <a:ext cx="7078063" cy="4439270"/>
+          </a:xfrm>
+          <a:prstGeom prst="rect">
+            <a:avLst/>
+          </a:prstGeom>
+        </p:spPr>
+      </p:pic>
+      <p:sp>
+        <p:nvSpPr>
+          <p:cNvPr id="19" name="Nyíl: balra mutató 18">
+            <a:hlinkClick r:id="rId3" action="ppaction://hlinksldjump"/>
+            <a:extLst>
+              <a:ext uri="{FF2B5EF4-FFF2-40B4-BE49-F238E27FC236}">
+                <a16:creationId xmlns:a16="http://schemas.microsoft.com/office/drawing/2014/main" id="{BC713ADB-D60D-48F5-B327-6CF1D036ED95}"/>
+              </a:ext>
+            </a:extLst>
+          </p:cNvPr>
+          <p:cNvSpPr/>
+          <p:nvPr/>
+        </p:nvSpPr>
+        <p:spPr>
+          <a:xfrm>
+            <a:off x="10740980" y="753228"/>
+            <a:ext cx="1210614" cy="1080938"/>
+          </a:xfrm>
+          <a:prstGeom prst="leftArrow">
+            <a:avLst/>
+          </a:prstGeom>
+        </p:spPr>
+        <p:style>
+          <a:lnRef idx="2">
+            <a:schemeClr val="accent1">
+              <a:shade val="50000"/>
+            </a:schemeClr>
+          </a:lnRef>
+          <a:fillRef idx="1">
+            <a:schemeClr val="accent1"/>
+          </a:fillRef>
+          <a:effectRef idx="0">
+            <a:schemeClr val="accent1"/>
+          </a:effectRef>
+          <a:fontRef idx="minor">
+            <a:schemeClr val="lt1"/>
+          </a:fontRef>
+        </p:style>
+        <p:txBody>
+          <a:bodyPr rtlCol="0" anchor="ctr"/>
+          <a:lstStyle/>
+          <a:p>
+            <a:pPr algn="ctr"/>
+            <a:endParaRPr lang="hu-HU"/>
+          </a:p>
+        </p:txBody>
+      </p:sp>
+    </p:spTree>
+    <p:extLst>
+      <p:ext uri="{BB962C8B-B14F-4D97-AF65-F5344CB8AC3E}">
+        <p14:creationId xmlns:p14="http://schemas.microsoft.com/office/powerpoint/2010/main" val="3851363501"/>
       </p:ext>
     </p:extLst>
   </p:cSld>

--- a/MAGYARORSZÁG LAKOSSÁGA 2025 ÉV.pptx
+++ b/MAGYARORSZÁG LAKOSSÁGA 2025 ÉV.pptx
@@ -7855,7 +7855,7 @@
                 <a:latin typeface="Artifakt Element Black" panose="020B0A03050000020004" pitchFamily="34" charset="-18"/>
                 <a:ea typeface="Artifakt Element Black" panose="020B0A03050000020004" pitchFamily="34" charset="-18"/>
               </a:rPr>
-              <a:t>FŐ MENÜ</a:t>
+              <a:t>Kezdőlap</a:t>
             </a:r>
           </a:p>
         </p:txBody>
@@ -7912,7 +7912,7 @@
         </p:nvSpPr>
         <p:spPr>
           <a:xfrm>
-            <a:off x="4564380" y="5070300"/>
+            <a:off x="4637728" y="5079514"/>
             <a:ext cx="3063240" cy="576262"/>
           </a:xfrm>
         </p:spPr>
@@ -8078,7 +8078,7 @@
         </p:nvGrpSpPr>
         <p:grpSpPr>
           <a:xfrm>
-            <a:off x="5100324" y="2556794"/>
+            <a:off x="5173672" y="2556794"/>
             <a:ext cx="1991352" cy="2021984"/>
             <a:chOff x="5100324" y="2556794"/>
             <a:chExt cx="1991352" cy="2021984"/>
@@ -8269,6 +8269,70 @@
           </p:txBody>
         </p:sp>
       </p:grpSp>
+      <p:sp>
+        <p:nvSpPr>
+          <p:cNvPr id="2" name="Téglalap 1">
+            <a:hlinkClick r:id="rId6" action="ppaction://hlinksldjump"/>
+            <a:extLst>
+              <a:ext uri="{FF2B5EF4-FFF2-40B4-BE49-F238E27FC236}">
+                <a16:creationId xmlns:a16="http://schemas.microsoft.com/office/drawing/2014/main" id="{9FC7FC11-9D40-4D49-A1D7-B5DDA7BE2A7C}"/>
+              </a:ext>
+            </a:extLst>
+          </p:cNvPr>
+          <p:cNvSpPr/>
+          <p:nvPr/>
+        </p:nvSpPr>
+        <p:spPr>
+          <a:xfrm>
+            <a:off x="5100324" y="5926667"/>
+            <a:ext cx="1991352" cy="787400"/>
+          </a:xfrm>
+          <a:prstGeom prst="rect">
+            <a:avLst/>
+          </a:prstGeom>
+          <a:solidFill>
+            <a:schemeClr val="bg1">
+              <a:lumMod val="95000"/>
+              <a:lumOff val="5000"/>
+            </a:schemeClr>
+          </a:solidFill>
+          <a:ln>
+            <a:solidFill>
+              <a:schemeClr val="bg1">
+                <a:lumMod val="95000"/>
+                <a:lumOff val="5000"/>
+              </a:schemeClr>
+            </a:solidFill>
+          </a:ln>
+        </p:spPr>
+        <p:style>
+          <a:lnRef idx="2">
+            <a:schemeClr val="accent1">
+              <a:shade val="50000"/>
+            </a:schemeClr>
+          </a:lnRef>
+          <a:fillRef idx="1">
+            <a:schemeClr val="accent1"/>
+          </a:fillRef>
+          <a:effectRef idx="0">
+            <a:schemeClr val="accent1"/>
+          </a:effectRef>
+          <a:fontRef idx="minor">
+            <a:schemeClr val="lt1"/>
+          </a:fontRef>
+        </p:style>
+        <p:txBody>
+          <a:bodyPr rtlCol="0" anchor="ctr"/>
+          <a:lstStyle/>
+          <a:p>
+            <a:pPr algn="ctr"/>
+            <a:r>
+              <a:rPr lang="hu-HU" dirty="0"/>
+              <a:t>Főmenü</a:t>
+            </a:r>
+          </a:p>
+        </p:txBody>
+      </p:sp>
     </p:spTree>
     <p:extLst>
       <p:ext uri="{BB962C8B-B14F-4D97-AF65-F5344CB8AC3E}">
